--- a/Report/presentation/B-BOT_final_presentation.pptx
+++ b/Report/presentation/B-BOT_final_presentation.pptx
@@ -3155,7 +3155,7 @@
         <p:spPr>
           <a:xfrm>
             <a:off x="658368" y="1627632"/>
-            <a:ext cx="8046720" cy="777240"/>
+            <a:ext cx="8412480" cy="777240"/>
           </a:xfrm>
           <a:prstGeom prst="rect">
             <a:avLst/>
@@ -3175,11 +3175,11 @@
                 </a:solidFill>
                 <a:latin typeface="Aptos"/>
               </a:rPr>
-              <a:t>A WiFi-Enabled Self-Balancing Wheel-Legged Robot</a:t>
+              <a:t>An Embedded Real-Time Control System</a:t>
             </a:r>
             <a:br/>
             <a:r>
-              <a:t>with ROS 2 Vision Teleoperation</a:t>
+              <a:t>for a WiFi-Enabled Wheel-Legged Balancing Platform</a:t>
             </a:r>
           </a:p>
         </p:txBody>
@@ -3213,7 +3213,7 @@
                 </a:solidFill>
                 <a:latin typeface="Aptos"/>
               </a:rPr>
-              <a:t>Botao Su | Third Year Individual Project | University of Manchester</a:t>
+              <a:t>Botao Su | Embedded Systems Individual Project | University of Manchester</a:t>
             </a:r>
           </a:p>
         </p:txBody>
@@ -3331,7 +3331,7 @@
               </a:defRPr>
             </a:pPr>
             <a:r>
-              <a:t>Balance-critical feedback stays on the ESP32.</a:t>
+              <a:t>Robot is the validation platform.</a:t>
             </a:r>
           </a:p>
           <a:p>
@@ -3347,7 +3347,7 @@
               </a:defRPr>
             </a:pPr>
             <a:r>
-              <a:t>WiFi, Xbox and ROS 2 vision send supervisory targets only.</a:t>
+              <a:t>Core work is the ESP32 embedded system.</a:t>
             </a:r>
           </a:p>
           <a:p>
@@ -3363,7 +3363,7 @@
               </a:defRPr>
             </a:pPr>
             <a:r>
-              <a:t>Safety arbitration is measured, not assumed.</a:t>
+              <a:t>Real-time control, I/O, communication and safety are measured.</a:t>
             </a:r>
           </a:p>
         </p:txBody>
@@ -5796,7 +5796,7 @@
                 </a:solidFill>
                 <a:latin typeface="Aptos"/>
               </a:rPr>
-              <a:t>The report is strongest when the boundaries are explicit.</a:t>
+              <a:t>The embedded-system boundaries are explicit.</a:t>
             </a:r>
           </a:p>
         </p:txBody>
@@ -5992,6 +5992,22 @@
             </a:pPr>
             <a:r>
               <a:t>IMU vibration, mechanical compliance and actuator saturation.</a:t>
+            </a:r>
+          </a:p>
+          <a:p>
+            <a:pPr>
+              <a:spcAft>
+                <a:spcPts val="700"/>
+              </a:spcAft>
+              <a:defRPr sz="1300">
+                <a:solidFill>
+                  <a:srgbClr val="16202B"/>
+                </a:solidFill>
+                <a:latin typeface="Aptos"/>
+              </a:defRPr>
+            </a:pPr>
+            <a:r>
+              <a:t>Measured timing tail outliers under shared workload.</a:t>
             </a:r>
           </a:p>
           <a:p>
@@ -6302,7 +6318,7 @@
                 </a:solidFill>
                 <a:latin typeface="Aptos"/>
               </a:rPr>
-              <a:t>B-BOT demonstrates a practical embedded balance architecture with safe supervisory teleoperation.</a:t>
+              <a:t>B-BOT demonstrates a practical ESP32 embedded control system on a challenging physical platform.</a:t>
             </a:r>
           </a:p>
         </p:txBody>
@@ -6426,7 +6442,7 @@
                 </a:solidFill>
                 <a:latin typeface="Aptos"/>
               </a:rPr>
-              <a:t>Main Contribution</a:t>
+              <a:t>Main Embedded Systems Contribution</a:t>
             </a:r>
           </a:p>
         </p:txBody>
@@ -6466,6 +6482,22 @@
             </a:pPr>
             <a:r>
               <a:t>ESP32 owns the balance-critical feedback loop.</a:t>
+            </a:r>
+          </a:p>
+          <a:p>
+            <a:pPr>
+              <a:spcAft>
+                <a:spcPts val="700"/>
+              </a:spcAft>
+              <a:defRPr sz="1300">
+                <a:solidFill>
+                  <a:srgbClr val="16202B"/>
+                </a:solidFill>
+                <a:latin typeface="Aptos"/>
+              </a:defRPr>
+            </a:pPr>
+            <a:r>
+              <a:t>Firmware integrates IMU, CAN motors, FreeRTOS tasks, BLE, UART and WiFi.</a:t>
             </a:r>
           </a:p>
           <a:p>
@@ -7331,7 +7363,7 @@
                 </a:solidFill>
                 <a:latin typeface="Aptos"/>
               </a:rPr>
-              <a:t>Project Problem</a:t>
+              <a:t>Embedded Systems Problem</a:t>
             </a:r>
           </a:p>
         </p:txBody>
@@ -7365,7 +7397,7 @@
                 </a:solidFill>
                 <a:latin typeface="Aptos"/>
               </a:rPr>
-              <a:t>An unstable robot should not depend on non-deterministic communication for balance.</a:t>
+              <a:t>A resource-constrained ESP32 must control an unstable platform while handling I/O and communication.</a:t>
             </a:r>
           </a:p>
         </p:txBody>
@@ -7489,7 +7521,7 @@
                 </a:solidFill>
                 <a:latin typeface="Aptos"/>
               </a:rPr>
-              <a:t>Wheel-Legged Challenge</a:t>
+              <a:t>Real-Time Control</a:t>
             </a:r>
           </a:p>
         </p:txBody>
@@ -7560,7 +7592,7 @@
               </a:defRPr>
             </a:pPr>
             <a:r>
-              <a:t>A fixed simple controller is fragile across configurations.</a:t>
+              <a:t>The 4 ms control loop must remain local.</a:t>
             </a:r>
           </a:p>
         </p:txBody>
@@ -7639,7 +7671,7 @@
                 </a:solidFill>
                 <a:latin typeface="Aptos"/>
               </a:rPr>
-              <a:t>Teleoperation Challenge</a:t>
+              <a:t>Embedded I/O Load</a:t>
             </a:r>
           </a:p>
         </p:txBody>
@@ -7678,7 +7710,7 @@
               </a:defRPr>
             </a:pPr>
             <a:r>
-              <a:t>WiFi and vision have variable latency.</a:t>
+              <a:t>IMU, CAN motors, battery, BLE, UART and WiFi.</a:t>
             </a:r>
           </a:p>
           <a:p>
@@ -7694,7 +7726,7 @@
               </a:defRPr>
             </a:pPr>
             <a:r>
-              <a:t>Human input sources can conflict.</a:t>
+              <a:t>FreeRTOS tasks share limited timing margin.</a:t>
             </a:r>
           </a:p>
           <a:p>
@@ -7710,7 +7742,7 @@
               </a:defRPr>
             </a:pPr>
             <a:r>
-              <a:t>Unsafe stale commands must be cleared predictably.</a:t>
+              <a:t>Logging and communication must not destabilise control.</a:t>
             </a:r>
           </a:p>
         </p:txBody>
@@ -7989,7 +8021,7 @@
                 </a:solidFill>
                 <a:latin typeface="Aptos"/>
               </a:rPr>
-              <a:t>The report and evaluation are organised around three testable objectives.</a:t>
+              <a:t>The evaluation is framed around embedded control, interfaces and safety.</a:t>
             </a:r>
           </a:p>
         </p:txBody>
@@ -8113,7 +8145,7 @@
                 </a:solidFill>
                 <a:latin typeface="Aptos"/>
               </a:rPr>
-              <a:t>O1 Embedded Balance</a:t>
+              <a:t>O1 Embedded Control</a:t>
             </a:r>
           </a:p>
         </p:txBody>
@@ -8168,7 +8200,7 @@
               </a:defRPr>
             </a:pPr>
             <a:r>
-              <a:t>Static stability and disturbance recovery.</a:t>
+              <a:t>ESP32 real-time loop and task timing.</a:t>
             </a:r>
           </a:p>
           <a:p>
@@ -8184,7 +8216,7 @@
               </a:defRPr>
             </a:pPr>
             <a:r>
-              <a:t>4 ms local control-loop timing.</a:t>
+              <a:t>Static stability and disturbance recovery.</a:t>
             </a:r>
           </a:p>
         </p:txBody>
@@ -8263,7 +8295,7 @@
                 </a:solidFill>
                 <a:latin typeface="Aptos"/>
               </a:rPr>
-              <a:t>O2 Vision + WiFi</a:t>
+              <a:t>O2 Command Interfaces</a:t>
             </a:r>
           </a:p>
         </p:txBody>
@@ -8579,7 +8611,7 @@
                 </a:solidFill>
                 <a:latin typeface="Aptos"/>
               </a:rPr>
-              <a:t>System Architecture</a:t>
+              <a:t>Embedded System Architecture</a:t>
             </a:r>
           </a:p>
         </p:txBody>
@@ -8613,7 +8645,7 @@
                 </a:solidFill>
                 <a:latin typeface="Aptos"/>
               </a:rPr>
-              <a:t>Time-critical balance is separated from supervisory command generation.</a:t>
+              <a:t>Time-critical firmware is separated from host-side supervisory command generation.</a:t>
             </a:r>
           </a:p>
         </p:txBody>
@@ -8963,7 +8995,7 @@
                 </a:solidFill>
                 <a:latin typeface="Aptos"/>
               </a:rPr>
-              <a:t>ESP32 Firmware</a:t>
+              <a:t>ESP32 Embedded Firmware</a:t>
             </a:r>
             <a:br/>
             <a:r>
@@ -9415,6 +9447,22 @@
             </a:pPr>
             <a:r>
               <a:t>Remote layers update targets, not stabilising feedback.</a:t>
+            </a:r>
+          </a:p>
+          <a:p>
+            <a:pPr>
+              <a:spcAft>
+                <a:spcPts val="700"/>
+              </a:spcAft>
+              <a:defRPr sz="1600">
+                <a:solidFill>
+                  <a:srgbClr val="16202B"/>
+                </a:solidFill>
+                <a:latin typeface="Aptos"/>
+              </a:defRPr>
+            </a:pPr>
+            <a:r>
+              <a:t>The embedded system owns sensing, motor feedback and safety stops.</a:t>
             </a:r>
           </a:p>
           <a:p>
@@ -9541,7 +9589,7 @@
                 </a:solidFill>
                 <a:latin typeface="Aptos"/>
               </a:rPr>
-              <a:t>Hardware and Firmware Implementation</a:t>
+              <a:t>Embedded Hardware and Firmware</a:t>
             </a:r>
           </a:p>
         </p:txBody>
@@ -9575,7 +9623,7 @@
                 </a:solidFill>
                 <a:latin typeface="Aptos"/>
               </a:rPr>
-              <a:t>A lightweight embedded stack built around ESP32, IMU feedback and CAN motor control.</a:t>
+              <a:t>A lightweight ESP32 stack integrating sensing, CAN motor I/O, wireless interfaces and safety logic.</a:t>
             </a:r>
           </a:p>
         </p:txBody>
@@ -9766,7 +9814,7 @@
                 </a:solidFill>
                 <a:latin typeface="Aptos"/>
               </a:rPr>
-              <a:t>Implementation Evidence</a:t>
+              <a:t>Embedded Implementation Evidence</a:t>
             </a:r>
           </a:p>
         </p:txBody>
@@ -9948,7 +9996,7 @@
                 </a:solidFill>
                 <a:latin typeface="Aptos"/>
               </a:rPr>
-              <a:t>Balance Control Hierarchy</a:t>
+              <a:t>Embedded Control Hierarchy</a:t>
             </a:r>
           </a:p>
         </p:txBody>
@@ -9982,7 +10030,7 @@
                 </a:solidFill>
                 <a:latin typeface="Aptos"/>
               </a:rPr>
-              <a:t>LQR handles coupled sagittal balance; PID and VMC handle local regulation and leg torque mapping.</a:t>
+              <a:t>The controller is designed to be interpretable and feasible on the ESP32.</a:t>
             </a:r>
           </a:p>
         </p:txBody>
@@ -10926,7 +10974,7 @@
                 </a:solidFill>
                 <a:latin typeface="Aptos"/>
               </a:rPr>
-              <a:t>Command and Safety Architecture</a:t>
+              <a:t>Embedded Command and Safety Architecture</a:t>
             </a:r>
           </a:p>
         </p:txBody>
@@ -10960,7 +11008,7 @@
                 </a:solidFill>
                 <a:latin typeface="Aptos"/>
               </a:rPr>
-              <a:t>Multiple command sources are allowed, but persistent unsafe motion is not.</a:t>
+              <a:t>Multiple interfaces are allowed, but persistent unsafe motion is not.</a:t>
             </a:r>
           </a:p>
         </p:txBody>
@@ -11974,7 +12022,7 @@
                 </a:solidFill>
                 <a:latin typeface="Aptos"/>
               </a:rPr>
-              <a:t>Eleven measured experiments plus O3 arbitration supplement.</a:t>
+              <a:t>Measured evidence for embedded timing, physical control, interfaces and safety.</a:t>
             </a:r>
           </a:p>
         </p:txBody>
